--- a/scripts/PowerPoint Slide Inventory Script/refined_v2/iteration_2/deck.pptx
+++ b/scripts/PowerPoint Slide Inventory Script/refined_v2/iteration_2/deck.pptx
@@ -15684,109 +15684,77 @@
           <a:lstStyle/>
           <a:p>
             <a:r>
-              <a:t>Six principal areas of specialism</a:t>
-            </a:r>
-          </a:p>
-        </p:txBody>
-      </p:sp>
-      <p:sp>
-        <p:nvSpPr>
-          <p:cNvPr id="3" name="Text Placeholder 2"/>
-          <p:cNvSpPr>
-            <a:spLocks noGrp="1"/>
-          </p:cNvSpPr>
-          <p:nvPr>
-            <p:ph type="body" idx="12" sz="quarter"/>
+              <a:t>Six specialisms across the DDaT lifecycle</a:t>
+            </a:r>
+          </a:p>
+        </p:txBody>
+      </p:sp>
+      <p:sp>
+        <p:nvSpPr>
+          <p:cNvPr id="3" name="Content Placeholder 2"/>
+          <p:cNvSpPr>
+            <a:spLocks noGrp="1"/>
+          </p:cNvSpPr>
+          <p:nvPr>
+            <p:ph idx="17" sz="quarter"/>
           </p:nvPr>
         </p:nvSpPr>
         <p:spPr/>
         <p:txBody>
           <a:bodyPr/>
           <a:lstStyle/>
-          <a:p>
-            <a:pPr>
-              <a:spcBef>
-                <a:spcPts val="400"/>
-              </a:spcBef>
-              <a:buChar char="•"/>
-            </a:pPr>
-            <a:r>
-              <a:rPr>
-                <a:latin typeface="Arial"/>
-              </a:rPr>
-              <a:t>Digital Service Design: user-centred, inclusive, outcome-driven</a:t>
-            </a:r>
-          </a:p>
-          <a:p>
-            <a:pPr>
-              <a:spcBef>
-                <a:spcPts val="400"/>
-              </a:spcBef>
-              <a:buChar char="•"/>
-            </a:pPr>
-            <a:r>
-              <a:rPr>
-                <a:latin typeface="Arial"/>
-              </a:rPr>
-              <a:t>Data, Analytics &amp; AI: governed platforms, predictive insights</a:t>
-            </a:r>
-          </a:p>
-          <a:p>
-            <a:pPr>
-              <a:spcBef>
-                <a:spcPts val="400"/>
-              </a:spcBef>
-              <a:buChar char="•"/>
-            </a:pPr>
-            <a:r>
-              <a:rPr>
-                <a:latin typeface="Arial"/>
-              </a:rPr>
-              <a:t>Platforms &amp; Integration: modular, API-led architectures</a:t>
-            </a:r>
-          </a:p>
-          <a:p>
-            <a:pPr>
-              <a:spcBef>
-                <a:spcPts val="400"/>
-              </a:spcBef>
-              <a:buChar char="•"/>
-            </a:pPr>
-            <a:r>
-              <a:rPr>
-                <a:latin typeface="Arial"/>
-              </a:rPr>
-              <a:t>Cloud &amp; DevOps: secure hybrid adoption, FinOps, resilience</a:t>
-            </a:r>
-          </a:p>
-          <a:p>
-            <a:pPr>
-              <a:spcBef>
-                <a:spcPts val="400"/>
-              </a:spcBef>
-              <a:buChar char="•"/>
-            </a:pPr>
-            <a:r>
-              <a:rPr>
-                <a:latin typeface="Arial"/>
-              </a:rPr>
-              <a:t>Technical Consultancy: advisory, coaching, embedded delivery</a:t>
-            </a:r>
-          </a:p>
-          <a:p>
-            <a:pPr>
-              <a:spcBef>
-                <a:spcPts val="400"/>
-              </a:spcBef>
-              <a:buChar char="•"/>
-            </a:pPr>
-            <a:r>
-              <a:rPr>
-                <a:latin typeface="Arial"/>
-              </a:rPr>
-              <a:t>Agile Delivery: product-led, measurable value, scaling</a:t>
-            </a:r>
-          </a:p>
+          <a:p/>
+        </p:txBody>
+      </p:sp>
+      <p:sp>
+        <p:nvSpPr>
+          <p:cNvPr id="4" name="Content Placeholder 3"/>
+          <p:cNvSpPr>
+            <a:spLocks noGrp="1"/>
+          </p:cNvSpPr>
+          <p:nvPr>
+            <p:ph idx="18" sz="quarter"/>
+          </p:nvPr>
+        </p:nvSpPr>
+        <p:spPr/>
+        <p:txBody>
+          <a:bodyPr/>
+          <a:lstStyle/>
+          <a:p/>
+        </p:txBody>
+      </p:sp>
+      <p:sp>
+        <p:nvSpPr>
+          <p:cNvPr id="5" name="Content Placeholder 4"/>
+          <p:cNvSpPr>
+            <a:spLocks noGrp="1"/>
+          </p:cNvSpPr>
+          <p:nvPr>
+            <p:ph idx="20" sz="quarter"/>
+          </p:nvPr>
+        </p:nvSpPr>
+        <p:spPr/>
+        <p:txBody>
+          <a:bodyPr/>
+          <a:lstStyle/>
+          <a:p/>
+        </p:txBody>
+      </p:sp>
+      <p:sp>
+        <p:nvSpPr>
+          <p:cNvPr id="6" name="Content Placeholder 5"/>
+          <p:cNvSpPr>
+            <a:spLocks noGrp="1"/>
+          </p:cNvSpPr>
+          <p:nvPr>
+            <p:ph idx="19" sz="quarter"/>
+          </p:nvPr>
+        </p:nvSpPr>
+        <p:spPr/>
+        <p:txBody>
+          <a:bodyPr/>
+          <a:lstStyle/>
+          <a:p/>
         </p:txBody>
       </p:sp>
     </p:spTree>
@@ -15823,7 +15791,7 @@
           <a:lstStyle/>
           <a:p>
             <a:r>
-              <a:t>Integrated Delivery Operating Model</a:t>
+              <a:t>Integrated delivery operating model</a:t>
             </a:r>
           </a:p>
         </p:txBody>
@@ -15847,99 +15815,55 @@
               <a:spcBef>
                 <a:spcPts val="400"/>
               </a:spcBef>
+              <a:buChar char="•"/>
             </a:pPr>
             <a:r>
               <a:rPr>
                 <a:latin typeface="Arial"/>
               </a:rPr>
-              <a:t>Strategic governance: align to priorities</a:t>
-            </a:r>
-          </a:p>
-        </p:txBody>
-      </p:sp>
-      <p:sp>
-        <p:nvSpPr>
-          <p:cNvPr id="4" name="Text Placeholder 3"/>
-          <p:cNvSpPr>
-            <a:spLocks noGrp="1"/>
-          </p:cNvSpPr>
-          <p:nvPr>
-            <p:ph type="body" idx="13" sz="quarter"/>
-          </p:nvPr>
-        </p:nvSpPr>
-        <p:spPr/>
-        <p:txBody>
-          <a:bodyPr/>
-          <a:lstStyle/>
+              <a:t>Strategic governance: align to priorities and funding decisions</a:t>
+            </a:r>
+          </a:p>
           <a:p>
             <a:pPr>
               <a:spcBef>
                 <a:spcPts val="400"/>
               </a:spcBef>
+              <a:buChar char="•"/>
             </a:pPr>
             <a:r>
               <a:rPr>
                 <a:latin typeface="Arial"/>
               </a:rPr>
-              <a:t>Programme governance: milestones &amp; risk</a:t>
-            </a:r>
-          </a:p>
-        </p:txBody>
-      </p:sp>
-      <p:sp>
-        <p:nvSpPr>
-          <p:cNvPr id="5" name="Text Placeholder 4"/>
-          <p:cNvSpPr>
-            <a:spLocks noGrp="1"/>
-          </p:cNvSpPr>
-          <p:nvPr>
-            <p:ph type="body" idx="14" sz="quarter"/>
-          </p:nvPr>
-        </p:nvSpPr>
-        <p:spPr/>
-        <p:txBody>
-          <a:bodyPr/>
-          <a:lstStyle/>
+              <a:t>Programme governance: manage milestones, dependencies, and risks</a:t>
+            </a:r>
+          </a:p>
           <a:p>
             <a:pPr>
               <a:spcBef>
                 <a:spcPts val="400"/>
               </a:spcBef>
+              <a:buChar char="•"/>
             </a:pPr>
             <a:r>
               <a:rPr>
                 <a:latin typeface="Arial"/>
               </a:rPr>
-              <a:t>Technical governance: standards &amp; assurance</a:t>
-            </a:r>
-          </a:p>
-        </p:txBody>
-      </p:sp>
-      <p:sp>
-        <p:nvSpPr>
-          <p:cNvPr id="6" name="Text Placeholder 5"/>
-          <p:cNvSpPr>
-            <a:spLocks noGrp="1"/>
-          </p:cNvSpPr>
-          <p:nvPr>
-            <p:ph type="body" idx="15" sz="quarter"/>
-          </p:nvPr>
-        </p:nvSpPr>
-        <p:spPr/>
-        <p:txBody>
-          <a:bodyPr/>
-          <a:lstStyle/>
+              <a:t>Technical governance: enforce standards, architecture, and assurance</a:t>
+            </a:r>
+          </a:p>
           <a:p>
             <a:pPr>
               <a:spcBef>
                 <a:spcPts val="400"/>
               </a:spcBef>
+              <a:buChar char="•"/>
             </a:pPr>
             <a:r>
               <a:rPr>
                 <a:latin typeface="Arial"/>
               </a:rPr>
-              <a:t>Embedded risk management: proactive mitigation</a:t>
+              <a:t>Embedded risk management: proactive mitigation across delivery</a:t>
             </a:r>
           </a:p>
         </p:txBody>
@@ -15978,7 +15902,7 @@
           <a:lstStyle/>
           <a:p>
             <a:r>
-              <a:t>Proven outcomes in UK public sector transformation</a:t>
+              <a:t>Proven DDaT outcomes across UK public sector</a:t>
             </a:r>
           </a:p>
         </p:txBody>
@@ -16008,7 +15932,49 @@
               <a:rPr>
                 <a:latin typeface="Arial"/>
               </a:rPr>
-              <a:t>IBM and Stable delivered successful DDaT programmes for UK public sector clients.</a:t>
+              <a:t>Environment Agency: unified data platform in 11 months</a:t>
+            </a:r>
+          </a:p>
+          <a:p>
+            <a:pPr>
+              <a:spcBef>
+                <a:spcPts val="400"/>
+              </a:spcBef>
+              <a:buChar char="•"/>
+            </a:pPr>
+            <a:r>
+              <a:rPr>
+                <a:latin typeface="Arial"/>
+              </a:rPr>
+              <a:t>DVLA: 30% faster data processing</a:t>
+            </a:r>
+          </a:p>
+          <a:p>
+            <a:pPr>
+              <a:spcBef>
+                <a:spcPts val="400"/>
+              </a:spcBef>
+              <a:buChar char="•"/>
+            </a:pPr>
+            <a:r>
+              <a:rPr>
+                <a:latin typeface="Arial"/>
+              </a:rPr>
+              <a:t>Welsh charities: bilingual digital services</a:t>
+            </a:r>
+          </a:p>
+          <a:p>
+            <a:pPr>
+              <a:spcBef>
+                <a:spcPts val="400"/>
+              </a:spcBef>
+              <a:buChar char="•"/>
+            </a:pPr>
+            <a:r>
+              <a:rPr>
+                <a:latin typeface="Arial"/>
+              </a:rPr>
+              <a:t>NHS Digital: 18-month integration programme</a:t>
             </a:r>
           </a:p>
         </p:txBody>
@@ -16086,7 +16052,7 @@
           <a:lstStyle/>
           <a:p>
             <a:r>
-              <a:t>Customer Platform discovery to shape a delivery roadmap</a:t>
+              <a:t>Discovery and shaping approach for the Customer Platform</a:t>
             </a:r>
           </a:p>
         </p:txBody>
@@ -16116,7 +16082,7 @@
               <a:rPr>
                 <a:latin typeface="Arial"/>
               </a:rPr>
-              <a:t>Embedded IBM + Stable team with NRW stakeholders</a:t>
+              <a:t>Blended IBM + Stable team embedded with NRW</a:t>
             </a:r>
           </a:p>
           <a:p>
@@ -16144,7 +16110,7 @@
               <a:rPr>
                 <a:latin typeface="Arial"/>
               </a:rPr>
-              <a:t>Mobilise discovery and shape the target roadmap</a:t>
+              <a:t>Discovery mobilises and shapes the roadmap</a:t>
             </a:r>
           </a:p>
           <a:p>
@@ -16158,7 +16124,7 @@
               <a:rPr>
                 <a:latin typeface="Arial"/>
               </a:rPr>
-              <a:t>Validate needs and operational context locally</a:t>
+              <a:t>Stakeholder engagement and operational context</a:t>
             </a:r>
           </a:p>
         </p:txBody>
@@ -16202,7 +16168,7 @@
               <a:rPr>
                 <a:latin typeface="Arial"/>
               </a:rPr>
-              <a:t>Assess Microsoft ecosystem fit and technical options</a:t>
+              <a:t>Technical assessment of the Microsoft ecosystem</a:t>
             </a:r>
           </a:p>
           <a:p>
@@ -16216,7 +16182,7 @@
               <a:rPr>
                 <a:latin typeface="Arial"/>
               </a:rPr>
-              <a:t>Define commercial model and delivery sequencing</a:t>
+              <a:t>Commercial review and delivery sequencing</a:t>
             </a:r>
           </a:p>
           <a:p>
@@ -16230,7 +16196,7 @@
               <a:rPr>
                 <a:latin typeface="Arial"/>
               </a:rPr>
-              <a:t>Make evidence-based investment decisions</a:t>
+              <a:t>Evidence-based investment decisions</a:t>
             </a:r>
           </a:p>
         </p:txBody>
@@ -16454,7 +16420,7 @@
               <a:rPr>
                 <a:latin typeface="Arial"/>
               </a:rPr>
-              <a:t>Layer 1: Engagement — channels and customer touchpoints</a:t>
+              <a:t>Layer 1: Engagement — channels and experiences</a:t>
             </a:r>
           </a:p>
           <a:p>
@@ -16482,7 +16448,7 @@
               <a:rPr>
                 <a:latin typeface="Arial"/>
               </a:rPr>
-              <a:t>Layer 3: Integration — Azure services for orchestration and APIs</a:t>
+              <a:t>Layer 3: Integration — Azure integration services for orchestration</a:t>
             </a:r>
           </a:p>
           <a:p>
@@ -16496,7 +16462,21 @@
               <a:rPr>
                 <a:latin typeface="Arial"/>
               </a:rPr>
-              <a:t>Layer 4: Data — analytics and insights from the data platform</a:t>
+              <a:t>Layer 4: Data — analytics and insights on the data platform</a:t>
+            </a:r>
+          </a:p>
+          <a:p>
+            <a:pPr>
+              <a:spcBef>
+                <a:spcPts val="400"/>
+              </a:spcBef>
+              <a:buChar char="•"/>
+            </a:pPr>
+            <a:r>
+              <a:rPr>
+                <a:latin typeface="Arial"/>
+              </a:rPr>
+              <a:t>CMS &amp; documents — SharePoint and CMS for content management</a:t>
             </a:r>
           </a:p>
         </p:txBody>
@@ -16551,125 +16531,77 @@
           <a:lstStyle/>
           <a:p>
             <a:r>
-              <a:t>Key architectural principles for platform evolution</a:t>
-            </a:r>
-          </a:p>
-        </p:txBody>
-      </p:sp>
-      <p:sp>
-        <p:nvSpPr>
-          <p:cNvPr id="3" name="Text Placeholder 2"/>
-          <p:cNvSpPr>
-            <a:spLocks noGrp="1"/>
-          </p:cNvSpPr>
-          <p:nvPr>
-            <p:ph type="body" idx="12" sz="quarter"/>
+              <a:t>Architectural principles for platform evolution</a:t>
+            </a:r>
+          </a:p>
+        </p:txBody>
+      </p:sp>
+      <p:sp>
+        <p:nvSpPr>
+          <p:cNvPr id="3" name="Content Placeholder 2"/>
+          <p:cNvSpPr>
+            <a:spLocks noGrp="1"/>
+          </p:cNvSpPr>
+          <p:nvPr>
+            <p:ph idx="17" sz="quarter"/>
           </p:nvPr>
         </p:nvSpPr>
         <p:spPr/>
         <p:txBody>
           <a:bodyPr/>
           <a:lstStyle/>
-          <a:p>
-            <a:pPr>
-              <a:spcBef>
-                <a:spcPts val="400"/>
-              </a:spcBef>
-            </a:pPr>
-            <a:r>
-              <a:rPr>
-                <a:latin typeface="Arial"/>
-              </a:rPr>
-              <a:t>Cloud-first, SaaS-preferred, managed services</a:t>
-            </a:r>
-          </a:p>
-        </p:txBody>
-      </p:sp>
-      <p:sp>
-        <p:nvSpPr>
-          <p:cNvPr id="4" name="Text Placeholder 3"/>
-          <p:cNvSpPr>
-            <a:spLocks noGrp="1"/>
-          </p:cNvSpPr>
-          <p:nvPr>
-            <p:ph type="body" idx="13" sz="quarter"/>
+          <a:p/>
+        </p:txBody>
+      </p:sp>
+      <p:sp>
+        <p:nvSpPr>
+          <p:cNvPr id="4" name="Content Placeholder 3"/>
+          <p:cNvSpPr>
+            <a:spLocks noGrp="1"/>
+          </p:cNvSpPr>
+          <p:nvPr>
+            <p:ph idx="18" sz="quarter"/>
           </p:nvPr>
         </p:nvSpPr>
         <p:spPr/>
         <p:txBody>
           <a:bodyPr/>
           <a:lstStyle/>
-          <a:p>
-            <a:pPr>
-              <a:spcBef>
-                <a:spcPts val="400"/>
-              </a:spcBef>
-            </a:pPr>
-            <a:r>
-              <a:rPr>
-                <a:latin typeface="Arial"/>
-              </a:rPr>
-              <a:t>Modularity and loose coupling</a:t>
-            </a:r>
-          </a:p>
-        </p:txBody>
-      </p:sp>
-      <p:sp>
-        <p:nvSpPr>
-          <p:cNvPr id="5" name="Text Placeholder 4"/>
-          <p:cNvSpPr>
-            <a:spLocks noGrp="1"/>
-          </p:cNvSpPr>
-          <p:nvPr>
-            <p:ph type="body" idx="14" sz="quarter"/>
+          <a:p/>
+        </p:txBody>
+      </p:sp>
+      <p:sp>
+        <p:nvSpPr>
+          <p:cNvPr id="5" name="Content Placeholder 4"/>
+          <p:cNvSpPr>
+            <a:spLocks noGrp="1"/>
+          </p:cNvSpPr>
+          <p:nvPr>
+            <p:ph idx="20" sz="quarter"/>
           </p:nvPr>
         </p:nvSpPr>
         <p:spPr/>
         <p:txBody>
           <a:bodyPr/>
           <a:lstStyle/>
-          <a:p>
-            <a:pPr>
-              <a:spcBef>
-                <a:spcPts val="400"/>
-              </a:spcBef>
-            </a:pPr>
-            <a:r>
-              <a:rPr>
-                <a:latin typeface="Arial"/>
-              </a:rPr>
-              <a:t>API-first and event-driven patterns</a:t>
-            </a:r>
-          </a:p>
-        </p:txBody>
-      </p:sp>
-      <p:sp>
-        <p:nvSpPr>
-          <p:cNvPr id="6" name="Text Placeholder 5"/>
-          <p:cNvSpPr>
-            <a:spLocks noGrp="1"/>
-          </p:cNvSpPr>
-          <p:nvPr>
-            <p:ph type="body" idx="15" sz="quarter"/>
+          <a:p/>
+        </p:txBody>
+      </p:sp>
+      <p:sp>
+        <p:nvSpPr>
+          <p:cNvPr id="6" name="Content Placeholder 5"/>
+          <p:cNvSpPr>
+            <a:spLocks noGrp="1"/>
+          </p:cNvSpPr>
+          <p:nvPr>
+            <p:ph idx="19" sz="quarter"/>
           </p:nvPr>
         </p:nvSpPr>
         <p:spPr/>
         <p:txBody>
           <a:bodyPr/>
           <a:lstStyle/>
-          <a:p>
-            <a:pPr>
-              <a:spcBef>
-                <a:spcPts val="400"/>
-              </a:spcBef>
-            </a:pPr>
-            <a:r>
-              <a:rPr>
-                <a:latin typeface="Arial"/>
-              </a:rPr>
-              <a:t>Data governance, security and privacy by design</a:t>
-            </a:r>
-          </a:p>
+          <a:p/>
         </p:txBody>
       </p:sp>
     </p:spTree>
@@ -16706,7 +16638,7 @@
           <a:lstStyle/>
           <a:p>
             <a:r>
-              <a:t>Addressing customer data fragmentation</a:t>
+              <a:t>Addressing Customer Data Fragmentation</a:t>
             </a:r>
           </a:p>
         </p:txBody>
@@ -16764,7 +16696,7 @@
               <a:rPr>
                 <a:latin typeface="Arial"/>
               </a:rPr>
-              <a:t>Fragmented user journeys and experiences</a:t>
+              <a:t>Fragmented user journeys and touchpoints</a:t>
             </a:r>
           </a:p>
           <a:p>
@@ -16778,7 +16710,7 @@
               <a:rPr>
                 <a:latin typeface="Arial"/>
               </a:rPr>
-              <a:t>Lack of real-time, coherent customer view</a:t>
+              <a:t>No real-time, coherent customer view</a:t>
             </a:r>
           </a:p>
         </p:txBody>
@@ -16817,7 +16749,7 @@
           <a:lstStyle/>
           <a:p>
             <a:r>
-              <a:t>Governed data integration with a platform-first approach</a:t>
+              <a:t>Data integration &amp; platform thinking</a:t>
             </a:r>
           </a:p>
         </p:txBody>
@@ -16861,7 +16793,7 @@
               <a:rPr>
                 <a:latin typeface="Arial"/>
               </a:rPr>
-              <a:t>Establish a shared customer identifier model</a:t>
+              <a:t>Introduce a shared customer identifier model</a:t>
             </a:r>
           </a:p>
           <a:p>
@@ -16889,7 +16821,7 @@
               <a:rPr>
                 <a:latin typeface="Arial"/>
               </a:rPr>
-              <a:t>API-based integration for near real-time data</a:t>
+              <a:t>API-based integration for real-time data</a:t>
             </a:r>
           </a:p>
         </p:txBody>
@@ -16919,7 +16851,7 @@
               <a:rPr>
                 <a:latin typeface="Arial"/>
               </a:rPr>
-              <a:t>Consolidate via MDM and survivorship rules</a:t>
+              <a:t>Controlled consolidation via MDM and survivorship rules</a:t>
             </a:r>
           </a:p>
           <a:p>
@@ -16933,7 +16865,7 @@
               <a:rPr>
                 <a:latin typeface="Arial"/>
               </a:rPr>
-              <a:t>Build on an Azure-native data platform for analytics</a:t>
+              <a:t>Use an Azure-native data platform for analytics</a:t>
             </a:r>
           </a:p>
           <a:p>
@@ -17153,7 +17085,7 @@
           <a:lstStyle/>
           <a:p>
             <a:r>
-              <a:t>Key risks and mitigations for data integration</a:t>
+              <a:t>Data integration risks: key mitigations</a:t>
             </a:r>
           </a:p>
         </p:txBody>
@@ -17183,7 +17115,7 @@
               <a:rPr>
                 <a:latin typeface="Arial"/>
               </a:rPr>
-              <a:t>Poor data quality reduces matching accuracy</a:t>
+              <a:t>Poor data quality impacts matching accuracy</a:t>
             </a:r>
           </a:p>
           <a:p>
@@ -17197,7 +17129,7 @@
               <a:rPr>
                 <a:latin typeface="Arial"/>
               </a:rPr>
-              <a:t>Hidden dependencies in legacy systems</a:t>
+              <a:t>Hidden legacy dependencies slow delivery</a:t>
             </a:r>
           </a:p>
           <a:p>
@@ -17211,7 +17143,7 @@
               <a:rPr>
                 <a:latin typeface="Arial"/>
               </a:rPr>
-              <a:t>Performance and security constraints on integration</a:t>
+              <a:t>Performance and security constraints limit throughput</a:t>
             </a:r>
           </a:p>
           <a:p>
@@ -17225,7 +17157,7 @@
               <a:rPr>
                 <a:latin typeface="Arial"/>
               </a:rPr>
-              <a:t>Unclear ownership of customer data</a:t>
+              <a:t>Unclear ownership reduces governance effectiveness</a:t>
             </a:r>
           </a:p>
         </p:txBody>
@@ -17269,7 +17201,7 @@
               <a:rPr>
                 <a:latin typeface="Arial"/>
               </a:rPr>
-              <a:t>Wrap legacy systems with an integration layer</a:t>
+              <a:t>Wrap legacy with an integration layer</a:t>
             </a:r>
           </a:p>
           <a:p>
@@ -17283,7 +17215,7 @@
               <a:rPr>
                 <a:latin typeface="Arial"/>
               </a:rPr>
-              <a:t>Use API connectivity with strong governance</a:t>
+              <a:t>Use API-driven connectivity with strong governance</a:t>
             </a:r>
           </a:p>
           <a:p>
@@ -17297,7 +17229,7 @@
               <a:rPr>
                 <a:latin typeface="Arial"/>
               </a:rPr>
-              <a:t>Resolve identity early; sequence by risk</a:t>
+              <a:t>Sequence identity resolution by risk, then scale</a:t>
             </a:r>
           </a:p>
         </p:txBody>
@@ -17336,7 +17268,7 @@
           <a:lstStyle/>
           <a:p>
             <a:r>
-              <a:t>Multidisciplinary delivery teams</a:t>
+              <a:t>Multidisciplinary delivery team structure</a:t>
             </a:r>
           </a:p>
         </p:txBody>
@@ -17360,6 +17292,7 @@
               <a:spcBef>
                 <a:spcPts val="400"/>
               </a:spcBef>
+              <a:buChar char="•"/>
             </a:pPr>
             <a:r>
               <a:rPr>
@@ -17368,27 +17301,12 @@
               <a:t>Service designers, business analysts, architects</a:t>
             </a:r>
           </a:p>
-        </p:txBody>
-      </p:sp>
-      <p:sp>
-        <p:nvSpPr>
-          <p:cNvPr id="4" name="Text Placeholder 3"/>
-          <p:cNvSpPr>
-            <a:spLocks noGrp="1"/>
-          </p:cNvSpPr>
-          <p:nvPr>
-            <p:ph type="body" idx="13" sz="quarter"/>
-          </p:nvPr>
-        </p:nvSpPr>
-        <p:spPr/>
-        <p:txBody>
-          <a:bodyPr/>
-          <a:lstStyle/>
           <a:p>
             <a:pPr>
               <a:spcBef>
                 <a:spcPts val="400"/>
               </a:spcBef>
+              <a:buChar char="•"/>
             </a:pPr>
             <a:r>
               <a:rPr>
@@ -17397,27 +17315,12 @@
               <a:t>Platform engineers, data specialists, product managers</a:t>
             </a:r>
           </a:p>
-        </p:txBody>
-      </p:sp>
-      <p:sp>
-        <p:nvSpPr>
-          <p:cNvPr id="5" name="Text Placeholder 4"/>
-          <p:cNvSpPr>
-            <a:spLocks noGrp="1"/>
-          </p:cNvSpPr>
-          <p:nvPr>
-            <p:ph type="body" idx="14" sz="quarter"/>
-          </p:nvPr>
-        </p:nvSpPr>
-        <p:spPr/>
-        <p:txBody>
-          <a:bodyPr/>
-          <a:lstStyle/>
           <a:p>
             <a:pPr>
               <a:spcBef>
                 <a:spcPts val="400"/>
               </a:spcBef>
+              <a:buChar char="•"/>
             </a:pPr>
             <a:r>
               <a:rPr>
@@ -17426,33 +17329,18 @@
               <a:t>UX researchers, security specialists</a:t>
             </a:r>
           </a:p>
-        </p:txBody>
-      </p:sp>
-      <p:sp>
-        <p:nvSpPr>
-          <p:cNvPr id="6" name="Text Placeholder 5"/>
-          <p:cNvSpPr>
-            <a:spLocks noGrp="1"/>
-          </p:cNvSpPr>
-          <p:nvPr>
-            <p:ph type="body" idx="15" sz="quarter"/>
-          </p:nvPr>
-        </p:nvSpPr>
-        <p:spPr/>
-        <p:txBody>
-          <a:bodyPr/>
-          <a:lstStyle/>
           <a:p>
             <a:pPr>
               <a:spcBef>
                 <a:spcPts val="400"/>
               </a:spcBef>
+              <a:buChar char="•"/>
             </a:pPr>
             <a:r>
               <a:rPr>
                 <a:latin typeface="Arial"/>
               </a:rPr>
-              <a:t>Blended IBM/Stable teams with NRW staff</a:t>
+              <a:t>Blended IBM/Stable teams with NRW staff embedded</a:t>
             </a:r>
           </a:p>
         </p:txBody>
@@ -17520,7 +17408,7 @@
               <a:rPr>
                 <a:latin typeface="Arial"/>
               </a:rPr>
-              <a:t>Alpha (Pilot): validate assumptions with pilot teams</a:t>
+              <a:t>Alpha: pilot teams; validate assumptions</a:t>
             </a:r>
           </a:p>
         </p:txBody>
@@ -17549,7 +17437,7 @@
               <a:rPr>
                 <a:latin typeface="Arial"/>
               </a:rPr>
-              <a:t>Beta (Expand): scale capabilities via frequent iterations</a:t>
+              <a:t>Beta: expand; frequent iterations</a:t>
             </a:r>
           </a:p>
         </p:txBody>
@@ -17578,7 +17466,7 @@
               <a:rPr>
                 <a:latin typeface="Arial"/>
               </a:rPr>
-              <a:t>Live (Operate): sustainable mix, maintenance, and operations</a:t>
+              <a:t>Live: sustainable mix; maintenance &amp; operations</a:t>
             </a:r>
           </a:p>
         </p:txBody>
@@ -17607,7 +17495,7 @@
               <a:rPr>
                 <a:latin typeface="Arial"/>
               </a:rPr>
-              <a:t>Retire (Transition): decommission with user engagement</a:t>
+              <a:t>Retire: decommissioning with user engagement</a:t>
             </a:r>
           </a:p>
         </p:txBody>
@@ -17646,7 +17534,7 @@
           <a:lstStyle/>
           <a:p>
             <a:r>
-              <a:t>Security, testing &amp; service sustainability</a:t>
+              <a:t>Security, testing and service sustainability</a:t>
             </a:r>
           </a:p>
         </p:txBody>
@@ -17676,7 +17564,7 @@
               <a:rPr>
                 <a:latin typeface="Arial"/>
               </a:rPr>
-              <a:t>Embed security, privacy &amp; compliance from the start</a:t>
+              <a:t>Security, privacy &amp; compliance built in from day one</a:t>
             </a:r>
           </a:p>
           <a:p>
@@ -17690,7 +17578,7 @@
               <a:rPr>
                 <a:latin typeface="Arial"/>
               </a:rPr>
-              <a:t>Run structured threat modelling &amp; compliance analysis</a:t>
+              <a:t>Threat modelling + compliance analysis by design</a:t>
             </a:r>
           </a:p>
           <a:p>
@@ -17704,7 +17592,7 @@
               <a:rPr>
                 <a:latin typeface="Arial"/>
               </a:rPr>
-              <a:t>Apply proportionate, risk-based testing &amp; assurance</a:t>
+              <a:t>Risk-based testing and proportionate assurance</a:t>
             </a:r>
           </a:p>
           <a:p>
@@ -17718,7 +17606,7 @@
               <a:rPr>
                 <a:latin typeface="Arial"/>
               </a:rPr>
-              <a:t>Design for live-service operability</a:t>
+              <a:t>Operability for live services, not afterthought</a:t>
             </a:r>
           </a:p>
         </p:txBody>
@@ -17748,7 +17636,7 @@
               <a:rPr>
                 <a:latin typeface="Arial"/>
               </a:rPr>
-              <a:t>Align to UK GDPR and Cyber Essentials Plus</a:t>
+              <a:t>UK GDPR + Cyber Essentials Plus alignment</a:t>
             </a:r>
           </a:p>
           <a:p>
@@ -17762,7 +17650,7 @@
               <a:rPr>
                 <a:latin typeface="Arial"/>
               </a:rPr>
-              <a:t>Increase assurance for high-risk components</a:t>
+              <a:t>Extra assurance for high-risk components</a:t>
             </a:r>
           </a:p>
           <a:p>
@@ -17776,7 +17664,7 @@
               <a:rPr>
                 <a:latin typeface="Arial"/>
               </a:rPr>
-              <a:t>Enable continuous monitoring and resilience</a:t>
+              <a:t>Continuous monitoring and resilience</a:t>
             </a:r>
           </a:p>
           <a:p>
@@ -17790,7 +17678,7 @@
               <a:rPr>
                 <a:latin typeface="Arial"/>
               </a:rPr>
-              <a:t>Progressively transition to NRW ownership</a:t>
+              <a:t>Knowledge transfer for NRW ownership readiness</a:t>
             </a:r>
           </a:p>
         </p:txBody>
@@ -17868,7 +17756,7 @@
           <a:lstStyle/>
           <a:p>
             <a:r>
-              <a:t>12-week innovation window: test &amp; validate</a:t>
+              <a:t>12-week innovation window: test, learn, improve</a:t>
             </a:r>
           </a:p>
         </p:txBody>
@@ -17907,125 +17795,77 @@
           <a:lstStyle/>
           <a:p>
             <a:r>
-              <a:t>Three innovation modes for website improvement</a:t>
-            </a:r>
-          </a:p>
-        </p:txBody>
-      </p:sp>
-      <p:sp>
-        <p:nvSpPr>
-          <p:cNvPr id="3" name="Text Placeholder 2"/>
-          <p:cNvSpPr>
-            <a:spLocks noGrp="1"/>
-          </p:cNvSpPr>
-          <p:nvPr>
-            <p:ph type="body" idx="12" sz="quarter"/>
+              <a:t>Innovation modes for website improvement</a:t>
+            </a:r>
+          </a:p>
+        </p:txBody>
+      </p:sp>
+      <p:sp>
+        <p:nvSpPr>
+          <p:cNvPr id="3" name="Content Placeholder 2"/>
+          <p:cNvSpPr>
+            <a:spLocks noGrp="1"/>
+          </p:cNvSpPr>
+          <p:nvPr>
+            <p:ph idx="17" sz="quarter"/>
           </p:nvPr>
         </p:nvSpPr>
         <p:spPr/>
         <p:txBody>
           <a:bodyPr/>
           <a:lstStyle/>
-          <a:p>
-            <a:pPr>
-              <a:spcBef>
-                <a:spcPts val="400"/>
-              </a:spcBef>
-            </a:pPr>
-            <a:r>
-              <a:rPr>
-                <a:latin typeface="Arial"/>
-              </a:rPr>
-              <a:t>Discovery-led: identify viable opportunities</a:t>
-            </a:r>
-          </a:p>
-        </p:txBody>
-      </p:sp>
-      <p:sp>
-        <p:nvSpPr>
-          <p:cNvPr id="4" name="Text Placeholder 3"/>
-          <p:cNvSpPr>
-            <a:spLocks noGrp="1"/>
-          </p:cNvSpPr>
-          <p:nvPr>
-            <p:ph type="body" idx="13" sz="quarter"/>
+          <a:p/>
+        </p:txBody>
+      </p:sp>
+      <p:sp>
+        <p:nvSpPr>
+          <p:cNvPr id="4" name="Content Placeholder 3"/>
+          <p:cNvSpPr>
+            <a:spLocks noGrp="1"/>
+          </p:cNvSpPr>
+          <p:nvPr>
+            <p:ph idx="18" sz="quarter"/>
           </p:nvPr>
         </p:nvSpPr>
         <p:spPr/>
         <p:txBody>
           <a:bodyPr/>
           <a:lstStyle/>
-          <a:p>
-            <a:pPr>
-              <a:spcBef>
-                <a:spcPts val="400"/>
-              </a:spcBef>
-            </a:pPr>
-            <a:r>
-              <a:rPr>
-                <a:latin typeface="Arial"/>
-              </a:rPr>
-              <a:t>Proof-led: validate defined ideas</a:t>
-            </a:r>
-          </a:p>
-        </p:txBody>
-      </p:sp>
-      <p:sp>
-        <p:nvSpPr>
-          <p:cNvPr id="5" name="Text Placeholder 4"/>
-          <p:cNvSpPr>
-            <a:spLocks noGrp="1"/>
-          </p:cNvSpPr>
-          <p:nvPr>
-            <p:ph type="body" idx="14" sz="quarter"/>
+          <a:p/>
+        </p:txBody>
+      </p:sp>
+      <p:sp>
+        <p:nvSpPr>
+          <p:cNvPr id="5" name="Content Placeholder 4"/>
+          <p:cNvSpPr>
+            <a:spLocks noGrp="1"/>
+          </p:cNvSpPr>
+          <p:nvPr>
+            <p:ph idx="20" sz="quarter"/>
           </p:nvPr>
         </p:nvSpPr>
         <p:spPr/>
         <p:txBody>
           <a:bodyPr/>
           <a:lstStyle/>
-          <a:p>
-            <a:pPr>
-              <a:spcBef>
-                <a:spcPts val="400"/>
-              </a:spcBef>
-            </a:pPr>
-            <a:r>
-              <a:rPr>
-                <a:latin typeface="Arial"/>
-              </a:rPr>
-              <a:t>Optimisation-led: improve known pain points</a:t>
-            </a:r>
-          </a:p>
-        </p:txBody>
-      </p:sp>
-      <p:sp>
-        <p:nvSpPr>
-          <p:cNvPr id="6" name="Text Placeholder 5"/>
-          <p:cNvSpPr>
-            <a:spLocks noGrp="1"/>
-          </p:cNvSpPr>
-          <p:nvPr>
-            <p:ph type="body" idx="15" sz="quarter"/>
+          <a:p/>
+        </p:txBody>
+      </p:sp>
+      <p:sp>
+        <p:nvSpPr>
+          <p:cNvPr id="6" name="Content Placeholder 5"/>
+          <p:cNvSpPr>
+            <a:spLocks noGrp="1"/>
+          </p:cNvSpPr>
+          <p:nvPr>
+            <p:ph idx="19" sz="quarter"/>
           </p:nvPr>
         </p:nvSpPr>
         <p:spPr/>
         <p:txBody>
           <a:bodyPr/>
           <a:lstStyle/>
-          <a:p>
-            <a:pPr>
-              <a:spcBef>
-                <a:spcPts val="400"/>
-              </a:spcBef>
-            </a:pPr>
-            <a:r>
-              <a:rPr>
-                <a:latin typeface="Arial"/>
-              </a:rPr>
-              <a:t>Rapid learning and evidence-driven decisions</a:t>
-            </a:r>
-          </a:p>
+          <a:p/>
         </p:txBody>
       </p:sp>
     </p:spTree>
@@ -18062,7 +17902,7 @@
           <a:lstStyle/>
           <a:p>
             <a:r>
-              <a:t>Four phases to generate evidence and drive decisions</a:t>
+              <a:t>Evidence generation: four phases</a:t>
             </a:r>
           </a:p>
         </p:txBody>
@@ -18091,7 +17931,7 @@
               <a:rPr>
                 <a:latin typeface="Arial"/>
               </a:rPr>
-              <a:t>Explore &amp; Discover: define hypotheses and success signals</a:t>
+              <a:t>Explore &amp; Discover: define hypotheses</a:t>
             </a:r>
           </a:p>
         </p:txBody>
@@ -18120,7 +17960,7 @@
               <a:rPr>
                 <a:latin typeface="Arial"/>
               </a:rPr>
-              <a:t>Ideate/Co-create: run low-cost experiments to learn fast</a:t>
+              <a:t>Ideate/Co-create: run low-cost experiments</a:t>
             </a:r>
           </a:p>
         </p:txBody>
@@ -18149,7 +17989,7 @@
               <a:rPr>
                 <a:latin typeface="Arial"/>
               </a:rPr>
-              <a:t>Design &amp; Build/Co-execute: deepen prototypes with evidence</a:t>
+              <a:t>Design &amp; Build: deepen prototypes</a:t>
             </a:r>
           </a:p>
         </p:txBody>
@@ -18178,7 +18018,7 @@
               <a:rPr>
                 <a:latin typeface="Arial"/>
               </a:rPr>
-              <a:t>Scale/Co-operate: consolidate results and decide next steps</a:t>
+              <a:t>Scale/Co-operate: consolidate evidence, decide next steps</a:t>
             </a:r>
           </a:p>
         </p:txBody>
@@ -18217,7 +18057,7 @@
           <a:lstStyle/>
           <a:p>
             <a:r>
-              <a:t>Hypothesis-led approach with decision-ready success criteria</a:t>
+              <a:t>Hypothesis-led approach and evidence-based success criteria</a:t>
             </a:r>
           </a:p>
         </p:txBody>
@@ -18592,7 +18432,7 @@
           <a:lstStyle/>
           <a:p>
             <a:r>
-              <a:t>Key risks, dependencies, and assumptions</a:t>
+              <a:t>Key risks, dependencies and assumptions</a:t>
             </a:r>
           </a:p>
         </p:txBody>
@@ -18622,7 +18462,7 @@
               <a:rPr>
                 <a:latin typeface="Arial"/>
               </a:rPr>
-              <a:t>Objectives not defined early</a:t>
+              <a:t>Poorly defined objectives</a:t>
             </a:r>
           </a:p>
           <a:p>
@@ -18708,7 +18548,7 @@
               <a:rPr>
                 <a:latin typeface="Arial"/>
               </a:rPr>
-              <a:t>Define hypotheses early</a:t>
+              <a:t>Early hypothesis definition</a:t>
             </a:r>
           </a:p>
           <a:p>
@@ -18722,7 +18562,7 @@
               <a:rPr>
                 <a:latin typeface="Arial"/>
               </a:rPr>
-              <a:t>Engage stakeholders and users upfront</a:t>
+              <a:t>Upfront stakeholder and user engagement</a:t>
             </a:r>
           </a:p>
           <a:p>
@@ -18736,7 +18576,7 @@
               <a:rPr>
                 <a:latin typeface="Arial"/>
               </a:rPr>
-              <a:t>Test feasibility before scaling</a:t>
+              <a:t>Feasibility testing before scaling</a:t>
             </a:r>
           </a:p>
           <a:p>
@@ -18750,7 +18590,7 @@
               <a:rPr>
                 <a:latin typeface="Arial"/>
               </a:rPr>
-              <a:t>Dispose of weak ideas quickly</a:t>
+              <a:t>Disciplined disposal of weak ideas</a:t>
             </a:r>
           </a:p>
           <a:p>
@@ -18764,7 +18604,7 @@
               <a:rPr>
                 <a:latin typeface="Arial"/>
               </a:rPr>
-              <a:t>Measure, report, and iterate</a:t>
+              <a:t>Clear measurement and reporting</a:t>
             </a:r>
           </a:p>
         </p:txBody>
@@ -18842,125 +18682,77 @@
           <a:lstStyle/>
           <a:p>
             <a:r>
-              <a:t>Embedding sustainability and social value in delivery</a:t>
-            </a:r>
-          </a:p>
-        </p:txBody>
-      </p:sp>
-      <p:sp>
-        <p:nvSpPr>
-          <p:cNvPr id="3" name="Text Placeholder 2"/>
-          <p:cNvSpPr>
-            <a:spLocks noGrp="1"/>
-          </p:cNvSpPr>
-          <p:nvPr>
-            <p:ph type="body" idx="12" sz="quarter"/>
+              <a:t>Sustainability &amp; social value in delivery</a:t>
+            </a:r>
+          </a:p>
+        </p:txBody>
+      </p:sp>
+      <p:sp>
+        <p:nvSpPr>
+          <p:cNvPr id="3" name="Content Placeholder 2"/>
+          <p:cNvSpPr>
+            <a:spLocks noGrp="1"/>
+          </p:cNvSpPr>
+          <p:nvPr>
+            <p:ph idx="17" sz="quarter"/>
           </p:nvPr>
         </p:nvSpPr>
         <p:spPr/>
         <p:txBody>
           <a:bodyPr/>
           <a:lstStyle/>
-          <a:p>
-            <a:pPr>
-              <a:spcBef>
-                <a:spcPts val="400"/>
-              </a:spcBef>
-            </a:pPr>
-            <a:r>
-              <a:rPr>
-                <a:latin typeface="Arial"/>
-              </a:rPr>
-              <a:t>Environmental impact reduction via cloud platforms</a:t>
-            </a:r>
-          </a:p>
-        </p:txBody>
-      </p:sp>
-      <p:sp>
-        <p:nvSpPr>
-          <p:cNvPr id="4" name="Text Placeholder 3"/>
-          <p:cNvSpPr>
-            <a:spLocks noGrp="1"/>
-          </p:cNvSpPr>
-          <p:nvPr>
-            <p:ph type="body" idx="13" sz="quarter"/>
+          <a:p/>
+        </p:txBody>
+      </p:sp>
+      <p:sp>
+        <p:nvSpPr>
+          <p:cNvPr id="4" name="Content Placeholder 3"/>
+          <p:cNvSpPr>
+            <a:spLocks noGrp="1"/>
+          </p:cNvSpPr>
+          <p:nvPr>
+            <p:ph idx="18" sz="quarter"/>
           </p:nvPr>
         </p:nvSpPr>
         <p:spPr/>
         <p:txBody>
           <a:bodyPr/>
           <a:lstStyle/>
-          <a:p>
-            <a:pPr>
-              <a:spcBef>
-                <a:spcPts val="400"/>
-              </a:spcBef>
-            </a:pPr>
-            <a:r>
-              <a:rPr>
-                <a:latin typeface="Arial"/>
-              </a:rPr>
-              <a:t>FinOps and GreenOps for cost and carbon visibility</a:t>
-            </a:r>
-          </a:p>
-        </p:txBody>
-      </p:sp>
-      <p:sp>
-        <p:nvSpPr>
-          <p:cNvPr id="5" name="Text Placeholder 4"/>
-          <p:cNvSpPr>
-            <a:spLocks noGrp="1"/>
-          </p:cNvSpPr>
-          <p:nvPr>
-            <p:ph type="body" idx="14" sz="quarter"/>
+          <a:p/>
+        </p:txBody>
+      </p:sp>
+      <p:sp>
+        <p:nvSpPr>
+          <p:cNvPr id="5" name="Content Placeholder 4"/>
+          <p:cNvSpPr>
+            <a:spLocks noGrp="1"/>
+          </p:cNvSpPr>
+          <p:nvPr>
+            <p:ph idx="20" sz="quarter"/>
           </p:nvPr>
         </p:nvSpPr>
         <p:spPr/>
         <p:txBody>
           <a:bodyPr/>
           <a:lstStyle/>
-          <a:p>
-            <a:pPr>
-              <a:spcBef>
-                <a:spcPts val="400"/>
-              </a:spcBef>
-            </a:pPr>
-            <a:r>
-              <a:rPr>
-                <a:latin typeface="Arial"/>
-              </a:rPr>
-              <a:t>Local employment and skills development</a:t>
-            </a:r>
-          </a:p>
-        </p:txBody>
-      </p:sp>
-      <p:sp>
-        <p:nvSpPr>
-          <p:cNvPr id="6" name="Text Placeholder 5"/>
-          <p:cNvSpPr>
-            <a:spLocks noGrp="1"/>
-          </p:cNvSpPr>
-          <p:nvPr>
-            <p:ph type="body" idx="15" sz="quarter"/>
+          <a:p/>
+        </p:txBody>
+      </p:sp>
+      <p:sp>
+        <p:nvSpPr>
+          <p:cNvPr id="6" name="Content Placeholder 5"/>
+          <p:cNvSpPr>
+            <a:spLocks noGrp="1"/>
+          </p:cNvSpPr>
+          <p:nvPr>
+            <p:ph idx="19" sz="quarter"/>
           </p:nvPr>
         </p:nvSpPr>
         <p:spPr/>
         <p:txBody>
           <a:bodyPr/>
           <a:lstStyle/>
-          <a:p>
-            <a:pPr>
-              <a:spcBef>
-                <a:spcPts val="400"/>
-              </a:spcBef>
-            </a:pPr>
-            <a:r>
-              <a:rPr>
-                <a:latin typeface="Arial"/>
-              </a:rPr>
-              <a:t>Welsh SME and social enterprise engagement</a:t>
-            </a:r>
-          </a:p>
+          <a:p/>
         </p:txBody>
       </p:sp>
     </p:spTree>
@@ -18997,7 +18789,7 @@
           <a:lstStyle/>
           <a:p>
             <a:r>
-              <a:t>Stable's social value impact in Wales</a:t>
+              <a:t>Stable’s Social Value Impact in Wales</a:t>
             </a:r>
           </a:p>
         </p:txBody>
@@ -19027,7 +18819,7 @@
               <a:rPr>
                 <a:latin typeface="Arial"/>
               </a:rPr>
-              <a:t>Welsh-based teams supporting local employment</a:t>
+              <a:t>Local employment: Welsh-based teams</a:t>
             </a:r>
           </a:p>
           <a:p>
@@ -19041,7 +18833,7 @@
               <a:rPr>
                 <a:latin typeface="Arial"/>
               </a:rPr>
-              <a:t>Internship pathways with local universities</a:t>
+              <a:t>Internships with local universities</a:t>
             </a:r>
           </a:p>
           <a:p>
@@ -19055,7 +18847,7 @@
               <a:rPr>
                 <a:latin typeface="Arial"/>
               </a:rPr>
-              <a:t>Community engagement with charities</a:t>
+              <a:t>Charity partnerships and community engagement</a:t>
             </a:r>
           </a:p>
           <a:p>
@@ -19099,7 +18891,7 @@
               <a:rPr>
                 <a:latin typeface="Arial"/>
               </a:rPr>
-              <a:t>Partnerships with Welsh SMEs and social enterprises</a:t>
+              <a:t>Welsh SMEs &amp; social enterprise partnerships</a:t>
             </a:r>
           </a:p>
           <a:p>
@@ -19127,7 +18919,7 @@
               <a:rPr>
                 <a:latin typeface="Arial"/>
               </a:rPr>
-              <a:t>Digital skills promotion in schools</a:t>
+              <a:t>Digital skills in schools</a:t>
             </a:r>
           </a:p>
           <a:p>
@@ -19141,7 +18933,7 @@
               <a:rPr>
                 <a:latin typeface="Arial"/>
               </a:rPr>
-              <a:t>Structured reporting and measurable outcomes</a:t>
+              <a:t>Transparent reporting &amp; measurable outcomes</a:t>
             </a:r>
           </a:p>
         </p:txBody>
@@ -19180,7 +18972,7 @@
           <a:lstStyle/>
           <a:p>
             <a:r>
-              <a:t>Monitoring sustainability and social value performance</a:t>
+              <a:t>Sustainability &amp; social value performance monitoring</a:t>
             </a:r>
           </a:p>
         </p:txBody>
@@ -19210,7 +19002,7 @@
               <a:rPr>
                 <a:latin typeface="Arial"/>
               </a:rPr>
-              <a:t>KPIs for carbon impact, supplier participation, skills uplift</a:t>
+              <a:t>KPIs: carbon impact, supplier participation, skills uplift</a:t>
             </a:r>
           </a:p>
           <a:p>
@@ -19238,7 +19030,7 @@
               <a:rPr>
                 <a:latin typeface="Arial"/>
               </a:rPr>
-              <a:t>Commitments scaled to engagement size</a:t>
+              <a:t>Commitments scaled to engagement size for lasting impact</a:t>
             </a:r>
           </a:p>
           <a:p>
@@ -19471,7 +19263,7 @@
           <a:lstStyle/>
           <a:p>
             <a:r>
-              <a:t>Key assumptions underpinning rate card and discounts</a:t>
+              <a:t>Rate card and discount assumptions</a:t>
             </a:r>
           </a:p>
         </p:txBody>
@@ -19515,7 +19307,7 @@
               <a:rPr>
                 <a:latin typeface="Arial"/>
               </a:rPr>
-              <a:t>8-hour working day in normal delivery environments</a:t>
+              <a:t>8-hour working day; normal delivery environments</a:t>
             </a:r>
           </a:p>
           <a:p>
@@ -19610,7 +19402,7 @@
           <a:lstStyle/>
           <a:p>
             <a:r>
-              <a:t>Innovation fund principles and governance</a:t>
+              <a:t>Innovation fund governance</a:t>
             </a:r>
           </a:p>
         </p:txBody>
@@ -19654,7 +19446,7 @@
               <a:rPr>
                 <a:latin typeface="Arial"/>
               </a:rPr>
-              <a:t>Balanced access to funds</a:t>
+              <a:t>Balanced access to funding</a:t>
             </a:r>
           </a:p>
           <a:p>
@@ -19685,22 +19477,6 @@
               <a:t>Collaborative innovation support</a:t>
             </a:r>
           </a:p>
-        </p:txBody>
-      </p:sp>
-      <p:sp>
-        <p:nvSpPr>
-          <p:cNvPr id="4" name="Text Placeholder 3"/>
-          <p:cNvSpPr>
-            <a:spLocks noGrp="1"/>
-          </p:cNvSpPr>
-          <p:nvPr>
-            <p:ph type="body" idx="12" sz="quarter"/>
-          </p:nvPr>
-        </p:nvSpPr>
-        <p:spPr/>
-        <p:txBody>
-          <a:bodyPr/>
-          <a:lstStyle/>
           <a:p>
             <a:pPr>
               <a:spcBef>
@@ -19712,9 +19488,25 @@
               <a:rPr>
                 <a:latin typeface="Arial"/>
               </a:rPr>
-              <a:t>Joint governance group with customer oversight</a:t>
-            </a:r>
-          </a:p>
+              <a:t>Annual equity and value review</a:t>
+            </a:r>
+          </a:p>
+        </p:txBody>
+      </p:sp>
+      <p:sp>
+        <p:nvSpPr>
+          <p:cNvPr id="4" name="Text Placeholder 3"/>
+          <p:cNvSpPr>
+            <a:spLocks noGrp="1"/>
+          </p:cNvSpPr>
+          <p:nvPr>
+            <p:ph type="body" idx="12" sz="quarter"/>
+          </p:nvPr>
+        </p:nvSpPr>
+        <p:spPr/>
+        <p:txBody>
+          <a:bodyPr/>
+          <a:lstStyle/>
           <a:p>
             <a:pPr>
               <a:spcBef>
@@ -19726,7 +19518,7 @@
               <a:rPr>
                 <a:latin typeface="Arial"/>
               </a:rPr>
-              <a:t>Visible criteria, scoring, rationale</a:t>
+              <a:t>Joint governance group with customer oversight</a:t>
             </a:r>
           </a:p>
           <a:p>
@@ -19740,7 +19532,7 @@
               <a:rPr>
                 <a:latin typeface="Arial"/>
               </a:rPr>
-              <a:t>Periodic review and adjustment</a:t>
+              <a:t>Visible criteria, scoring, and rationale</a:t>
             </a:r>
           </a:p>
           <a:p>
@@ -19754,7 +19546,35 @@
               <a:rPr>
                 <a:latin typeface="Arial"/>
               </a:rPr>
-              <a:t>Structured participation, open outcomes</a:t>
+              <a:t>Periodic review and adjustment</a:t>
+            </a:r>
+          </a:p>
+          <a:p>
+            <a:pPr>
+              <a:spcBef>
+                <a:spcPts val="400"/>
+              </a:spcBef>
+              <a:buChar char="•"/>
+            </a:pPr>
+            <a:r>
+              <a:rPr>
+                <a:latin typeface="Arial"/>
+              </a:rPr>
+              <a:t>Structured participation and open outcomes</a:t>
+            </a:r>
+          </a:p>
+          <a:p>
+            <a:pPr>
+              <a:spcBef>
+                <a:spcPts val="400"/>
+              </a:spcBef>
+              <a:buChar char="•"/>
+            </a:pPr>
+            <a:r>
+              <a:rPr>
+                <a:latin typeface="Arial"/>
+              </a:rPr>
+              <a:t>Maximise customer and supplier benefit</a:t>
             </a:r>
           </a:p>
         </p:txBody>
@@ -19832,7 +19652,7 @@
           <a:lstStyle/>
           <a:p>
             <a:r>
-              <a:t>IBM and Stable deliver scale and sustainable capability</a:t>
+              <a:t>IBM and Stable deliver scale, local expertise, sustainable capability</a:t>
             </a:r>
           </a:p>
         </p:txBody>
@@ -19871,7 +19691,7 @@
           <a:lstStyle/>
           <a:p>
             <a:r>
-              <a:t>Next steps to mobilise NRW and supplier discovery</a:t>
+              <a:t>Next steps: mobilise NRW and suppliers for discovery</a:t>
             </a:r>
           </a:p>
         </p:txBody>
@@ -19987,7 +19807,7 @@
               <a:rPr>
                 <a:latin typeface="Arial"/>
               </a:rPr>
-              <a:t>NRW: share system inventory and data dictionary</a:t>
+              <a:t>NRW: share system inventory &amp; data dictionary</a:t>
             </a:r>
           </a:p>
           <a:p>
@@ -20001,7 +19821,7 @@
               <a:rPr>
                 <a:latin typeface="Arial"/>
               </a:rPr>
-              <a:t>NRW: agree innovation window hypotheses</a:t>
+              <a:t>NRW: align on innovation window hypotheses</a:t>
             </a:r>
           </a:p>
           <a:p>
@@ -20015,7 +19835,7 @@
               <a:rPr>
                 <a:latin typeface="Arial"/>
               </a:rPr>
-              <a:t>NRW: review sustainability and social value KPIs</a:t>
+              <a:t>NRW: review sustainability &amp; social value KPIs</a:t>
             </a:r>
           </a:p>
         </p:txBody>
@@ -20083,37 +19903,60 @@
               <a:rPr>
                 <a:latin typeface="Arial"/>
               </a:rPr>
-              <a:t>For follow-up:</a:t>
+              <a:t>Dave Aspden — Stable CEO</a:t>
             </a:r>
             <a:br/>
             <a:r>
               <a:rPr>
                 <a:latin typeface="Arial"/>
               </a:rPr>
-              <a:t>Dave Aspden (Stable CEO) — dave@stable.co.uk</a:t>
-            </a:r>
+              <a:t>dave@stable.co.uk</a:t>
+            </a:r>
+            <a:br/>
             <a:br/>
             <a:r>
               <a:rPr>
                 <a:latin typeface="Arial"/>
               </a:rPr>
-              <a:t>Phil Davenport (IBM Client Delivery Partner) — philip.davenport@ibm.com</a:t>
+              <a:t>Phil Davenport — IBM Client Delivery Partner</a:t>
             </a:r>
             <a:br/>
             <a:r>
               <a:rPr>
                 <a:latin typeface="Arial"/>
               </a:rPr>
-              <a:t>David Rowley (IBM Microsoft Practice CTO) — david.rowley@ibm.com</a:t>
-            </a:r>
+              <a:t>philip.davenport@ibm.com</a:t>
+            </a:r>
+            <a:br/>
             <a:br/>
             <a:r>
               <a:rPr>
                 <a:latin typeface="Arial"/>
               </a:rPr>
-              <a:t>Ryan Lewis (Stable CTO/MD) — ryan@stable.co.uk</a:t>
+              <a:t>David Rowley — IBM Microsoft Practice CTO</a:t>
             </a:r>
             <a:br/>
+            <a:r>
+              <a:rPr>
+                <a:latin typeface="Arial"/>
+              </a:rPr>
+              <a:t>david.rowley@ibm.com</a:t>
+            </a:r>
+            <a:br/>
+            <a:br/>
+            <a:r>
+              <a:rPr>
+                <a:latin typeface="Arial"/>
+              </a:rPr>
+              <a:t>Ryan Lewis — Stable CTO/MD</a:t>
+            </a:r>
+            <a:br/>
+            <a:r>
+              <a:rPr>
+                <a:latin typeface="Arial"/>
+              </a:rPr>
+              <a:t>ryan@stable.co.uk</a:t>
+            </a:r>
           </a:p>
         </p:txBody>
       </p:sp>
@@ -20371,7 +20214,7 @@
               <a:rPr>
                 <a:latin typeface="Arial"/>
               </a:rPr>
-              <a:t>Regulated environment requires structured methods</a:t>
+              <a:t>Regulated environment needs structured delivery methods</a:t>
             </a:r>
           </a:p>
           <a:p>
@@ -20385,7 +20228,7 @@
               <a:rPr>
                 <a:latin typeface="Arial"/>
               </a:rPr>
-              <a:t>Multi-stakeholder context needs local engagement</a:t>
+              <a:t>Multi-stakeholder context requires local engagement</a:t>
             </a:r>
           </a:p>
           <a:p>
@@ -20399,7 +20242,7 @@
               <a:rPr>
                 <a:latin typeface="Arial"/>
               </a:rPr>
-              <a:t>Maintain operational resilience during change</a:t>
+              <a:t>Maintain operational resilience during transformation</a:t>
             </a:r>
           </a:p>
         </p:txBody>
@@ -20429,7 +20272,7 @@
               <a:rPr>
                 <a:latin typeface="Arial"/>
               </a:rPr>
-              <a:t>Capability uplift enables sustainable transformation</a:t>
+              <a:t>Capability uplift enables sustainable change</a:t>
             </a:r>
           </a:p>
           <a:p>
@@ -20457,7 +20300,7 @@
               <a:rPr>
                 <a:latin typeface="Arial"/>
               </a:rPr>
-              <a:t>Bilingual needs met through local expertise</a:t>
+              <a:t>Local bilingual expertise meets language requirements</a:t>
             </a:r>
           </a:p>
         </p:txBody>
@@ -20526,7 +20369,7 @@
               <a:rPr>
                 <a:latin typeface="Arial"/>
               </a:rPr>
-              <a:t>Local: Stable Welsh delivery partner</a:t>
+              <a:t>Stable: Welsh delivery partner</a:t>
             </a:r>
           </a:p>
           <a:p>
@@ -20540,7 +20383,7 @@
               <a:rPr>
                 <a:latin typeface="Arial"/>
               </a:rPr>
-              <a:t>Local architectural and engineering expertise</a:t>
+              <a:t>Local architecture &amp; engineering expertise</a:t>
             </a:r>
           </a:p>
           <a:p>
@@ -20554,7 +20397,7 @@
               <a:rPr>
                 <a:latin typeface="Arial"/>
               </a:rPr>
-              <a:t>Deep ties to Welsh communities and public sector</a:t>
+              <a:t>Community and public-sector relationships</a:t>
             </a:r>
           </a:p>
           <a:p>
@@ -20598,7 +20441,7 @@
               <a:rPr>
                 <a:latin typeface="Arial"/>
               </a:rPr>
-              <a:t>Global: IBM scale and specialist accelerators</a:t>
+              <a:t>IBM: global scale and specialist accelerators</a:t>
             </a:r>
           </a:p>
           <a:p>
@@ -20612,7 +20455,7 @@
               <a:rPr>
                 <a:latin typeface="Arial"/>
               </a:rPr>
-              <a:t>Structured integration with IBM-led teams</a:t>
+              <a:t>Integrated IBM-led teams</a:t>
             </a:r>
           </a:p>
           <a:p>
@@ -20626,7 +20469,7 @@
               <a:rPr>
                 <a:latin typeface="Arial"/>
               </a:rPr>
-              <a:t>Knowledge transfer embedded in delivery</a:t>
+              <a:t>Embedded knowledge transfer</a:t>
             </a:r>
           </a:p>
           <a:p>
@@ -20725,118 +20568,70 @@
       </p:sp>
       <p:sp>
         <p:nvSpPr>
-          <p:cNvPr id="3" name="Text Placeholder 2"/>
-          <p:cNvSpPr>
-            <a:spLocks noGrp="1"/>
-          </p:cNvSpPr>
-          <p:nvPr>
-            <p:ph type="body" idx="12" sz="quarter"/>
+          <p:cNvPr id="3" name="Content Placeholder 2"/>
+          <p:cNvSpPr>
+            <a:spLocks noGrp="1"/>
+          </p:cNvSpPr>
+          <p:nvPr>
+            <p:ph idx="17" sz="quarter"/>
           </p:nvPr>
         </p:nvSpPr>
         <p:spPr/>
         <p:txBody>
           <a:bodyPr/>
           <a:lstStyle/>
-          <a:p>
-            <a:pPr>
-              <a:spcBef>
-                <a:spcPts val="400"/>
-              </a:spcBef>
-            </a:pPr>
-            <a:r>
-              <a:rPr>
-                <a:latin typeface="Arial"/>
-              </a:rPr>
-              <a:t>End-to-end digital, data and technology delivery</a:t>
-            </a:r>
-          </a:p>
-        </p:txBody>
-      </p:sp>
-      <p:sp>
-        <p:nvSpPr>
-          <p:cNvPr id="4" name="Text Placeholder 3"/>
-          <p:cNvSpPr>
-            <a:spLocks noGrp="1"/>
-          </p:cNvSpPr>
-          <p:nvPr>
-            <p:ph type="body" idx="13" sz="quarter"/>
+          <a:p/>
+        </p:txBody>
+      </p:sp>
+      <p:sp>
+        <p:nvSpPr>
+          <p:cNvPr id="4" name="Content Placeholder 3"/>
+          <p:cNvSpPr>
+            <a:spLocks noGrp="1"/>
+          </p:cNvSpPr>
+          <p:nvPr>
+            <p:ph idx="18" sz="quarter"/>
           </p:nvPr>
         </p:nvSpPr>
         <p:spPr/>
         <p:txBody>
           <a:bodyPr/>
           <a:lstStyle/>
-          <a:p>
-            <a:pPr>
-              <a:spcBef>
-                <a:spcPts val="400"/>
-              </a:spcBef>
-            </a:pPr>
-            <a:r>
-              <a:rPr>
-                <a:latin typeface="Arial"/>
-              </a:rPr>
-              <a:t>Structured engineering, product and design disciplines</a:t>
-            </a:r>
-          </a:p>
-        </p:txBody>
-      </p:sp>
-      <p:sp>
-        <p:nvSpPr>
-          <p:cNvPr id="5" name="Text Placeholder 4"/>
-          <p:cNvSpPr>
-            <a:spLocks noGrp="1"/>
-          </p:cNvSpPr>
-          <p:nvPr>
-            <p:ph type="body" idx="14" sz="quarter"/>
+          <a:p/>
+        </p:txBody>
+      </p:sp>
+      <p:sp>
+        <p:nvSpPr>
+          <p:cNvPr id="5" name="Content Placeholder 4"/>
+          <p:cNvSpPr>
+            <a:spLocks noGrp="1"/>
+          </p:cNvSpPr>
+          <p:nvPr>
+            <p:ph idx="20" sz="quarter"/>
           </p:nvPr>
         </p:nvSpPr>
         <p:spPr/>
         <p:txBody>
           <a:bodyPr/>
           <a:lstStyle/>
-          <a:p>
-            <a:pPr>
-              <a:spcBef>
-                <a:spcPts val="400"/>
-              </a:spcBef>
-            </a:pPr>
-            <a:r>
-              <a:rPr>
-                <a:latin typeface="Arial"/>
-              </a:rPr>
-              <a:t>Experience in complex, regulated environments</a:t>
-            </a:r>
-          </a:p>
-        </p:txBody>
-      </p:sp>
-      <p:sp>
-        <p:nvSpPr>
-          <p:cNvPr id="6" name="Text Placeholder 5"/>
-          <p:cNvSpPr>
-            <a:spLocks noGrp="1"/>
-          </p:cNvSpPr>
-          <p:nvPr>
-            <p:ph type="body" idx="15" sz="quarter"/>
+          <a:p/>
+        </p:txBody>
+      </p:sp>
+      <p:sp>
+        <p:nvSpPr>
+          <p:cNvPr id="6" name="Content Placeholder 5"/>
+          <p:cNvSpPr>
+            <a:spLocks noGrp="1"/>
+          </p:cNvSpPr>
+          <p:nvPr>
+            <p:ph idx="19" sz="quarter"/>
           </p:nvPr>
         </p:nvSpPr>
         <p:spPr/>
         <p:txBody>
           <a:bodyPr/>
           <a:lstStyle/>
-          <a:p>
-            <a:pPr>
-              <a:spcBef>
-                <a:spcPts val="400"/>
-              </a:spcBef>
-            </a:pPr>
-            <a:r>
-              <a:rPr>
-                <a:latin typeface="Arial"/>
-              </a:rPr>
-              <a:t>Sustainable capability building and knowledge transfer</a:t>
-            </a:r>
-          </a:p>
+          <a:p/>
         </p:txBody>
       </p:sp>
     </p:spTree>
